--- a/sentimenttostructure/SentimenttoStructure_26_174.pptx
+++ b/sentimenttostructure/SentimenttoStructure_26_174.pptx
@@ -277,7 +277,7 @@
           <a:p>
             <a:fld id="{5B075F7D-1024-4663-9409-2B9680284374}" type="datetimeFigureOut">
               <a:rPr lang="en-GB" smtClean="0"/>
-              <a:t>28/04/2026</a:t>
+              <a:t>29/04/2026</a:t>
             </a:fld>
             <a:endParaRPr lang="en-GB"/>
           </a:p>
@@ -477,7 +477,7 @@
           <a:p>
             <a:fld id="{5B075F7D-1024-4663-9409-2B9680284374}" type="datetimeFigureOut">
               <a:rPr lang="en-GB" smtClean="0"/>
-              <a:t>28/04/2026</a:t>
+              <a:t>29/04/2026</a:t>
             </a:fld>
             <a:endParaRPr lang="en-GB"/>
           </a:p>
@@ -687,7 +687,7 @@
           <a:p>
             <a:fld id="{5B075F7D-1024-4663-9409-2B9680284374}" type="datetimeFigureOut">
               <a:rPr lang="en-GB" smtClean="0"/>
-              <a:t>28/04/2026</a:t>
+              <a:t>29/04/2026</a:t>
             </a:fld>
             <a:endParaRPr lang="en-GB"/>
           </a:p>
@@ -887,7 +887,7 @@
           <a:p>
             <a:fld id="{5B075F7D-1024-4663-9409-2B9680284374}" type="datetimeFigureOut">
               <a:rPr lang="en-GB" smtClean="0"/>
-              <a:t>28/04/2026</a:t>
+              <a:t>29/04/2026</a:t>
             </a:fld>
             <a:endParaRPr lang="en-GB"/>
           </a:p>
@@ -1163,7 +1163,7 @@
           <a:p>
             <a:fld id="{5B075F7D-1024-4663-9409-2B9680284374}" type="datetimeFigureOut">
               <a:rPr lang="en-GB" smtClean="0"/>
-              <a:t>28/04/2026</a:t>
+              <a:t>29/04/2026</a:t>
             </a:fld>
             <a:endParaRPr lang="en-GB"/>
           </a:p>
@@ -1431,7 +1431,7 @@
           <a:p>
             <a:fld id="{5B075F7D-1024-4663-9409-2B9680284374}" type="datetimeFigureOut">
               <a:rPr lang="en-GB" smtClean="0"/>
-              <a:t>28/04/2026</a:t>
+              <a:t>29/04/2026</a:t>
             </a:fld>
             <a:endParaRPr lang="en-GB"/>
           </a:p>
@@ -1846,7 +1846,7 @@
           <a:p>
             <a:fld id="{5B075F7D-1024-4663-9409-2B9680284374}" type="datetimeFigureOut">
               <a:rPr lang="en-GB" smtClean="0"/>
-              <a:t>28/04/2026</a:t>
+              <a:t>29/04/2026</a:t>
             </a:fld>
             <a:endParaRPr lang="en-GB"/>
           </a:p>
@@ -1988,7 +1988,7 @@
           <a:p>
             <a:fld id="{5B075F7D-1024-4663-9409-2B9680284374}" type="datetimeFigureOut">
               <a:rPr lang="en-GB" smtClean="0"/>
-              <a:t>28/04/2026</a:t>
+              <a:t>29/04/2026</a:t>
             </a:fld>
             <a:endParaRPr lang="en-GB"/>
           </a:p>
@@ -2101,7 +2101,7 @@
           <a:p>
             <a:fld id="{5B075F7D-1024-4663-9409-2B9680284374}" type="datetimeFigureOut">
               <a:rPr lang="en-GB" smtClean="0"/>
-              <a:t>28/04/2026</a:t>
+              <a:t>29/04/2026</a:t>
             </a:fld>
             <a:endParaRPr lang="en-GB"/>
           </a:p>
@@ -2414,7 +2414,7 @@
           <a:p>
             <a:fld id="{5B075F7D-1024-4663-9409-2B9680284374}" type="datetimeFigureOut">
               <a:rPr lang="en-GB" smtClean="0"/>
-              <a:t>28/04/2026</a:t>
+              <a:t>29/04/2026</a:t>
             </a:fld>
             <a:endParaRPr lang="en-GB"/>
           </a:p>
@@ -2703,7 +2703,7 @@
           <a:p>
             <a:fld id="{5B075F7D-1024-4663-9409-2B9680284374}" type="datetimeFigureOut">
               <a:rPr lang="en-GB" smtClean="0"/>
-              <a:t>28/04/2026</a:t>
+              <a:t>29/04/2026</a:t>
             </a:fld>
             <a:endParaRPr lang="en-GB"/>
           </a:p>
@@ -2946,7 +2946,7 @@
           <a:p>
             <a:fld id="{5B075F7D-1024-4663-9409-2B9680284374}" type="datetimeFigureOut">
               <a:rPr lang="en-GB" smtClean="0"/>
-              <a:t>28/04/2026</a:t>
+              <a:t>29/04/2026</a:t>
             </a:fld>
             <a:endParaRPr lang="en-GB"/>
           </a:p>
@@ -8134,6 +8134,66 @@
           </a:p>
         </p:txBody>
       </p:sp>
+      <p:pic>
+        <p:nvPicPr>
+          <p:cNvPr id="5" name="Picture 4">
+            <a:extLst>
+              <a:ext uri="{FF2B5EF4-FFF2-40B4-BE49-F238E27FC236}">
+                <a16:creationId xmlns:a16="http://schemas.microsoft.com/office/drawing/2014/main" id="{8A5EBC4C-26F0-C5D8-FF09-E941F2AED7CD}"/>
+              </a:ext>
+            </a:extLst>
+          </p:cNvPr>
+          <p:cNvPicPr>
+            <a:picLocks noChangeAspect="1"/>
+          </p:cNvPicPr>
+          <p:nvPr/>
+        </p:nvPicPr>
+        <p:blipFill>
+          <a:blip r:embed="rId3"/>
+          <a:stretch>
+            <a:fillRect/>
+          </a:stretch>
+        </p:blipFill>
+        <p:spPr>
+          <a:xfrm>
+            <a:off x="1110319" y="1253886"/>
+            <a:ext cx="1448002" cy="1600423"/>
+          </a:xfrm>
+          <a:prstGeom prst="rect">
+            <a:avLst/>
+          </a:prstGeom>
+        </p:spPr>
+      </p:pic>
+      <p:pic>
+        <p:nvPicPr>
+          <p:cNvPr id="7" name="Picture 6">
+            <a:extLst>
+              <a:ext uri="{FF2B5EF4-FFF2-40B4-BE49-F238E27FC236}">
+                <a16:creationId xmlns:a16="http://schemas.microsoft.com/office/drawing/2014/main" id="{25506D53-7AD9-4983-E93D-04F5AA9C9ABB}"/>
+              </a:ext>
+            </a:extLst>
+          </p:cNvPr>
+          <p:cNvPicPr>
+            <a:picLocks noChangeAspect="1"/>
+          </p:cNvPicPr>
+          <p:nvPr/>
+        </p:nvPicPr>
+        <p:blipFill>
+          <a:blip r:embed="rId4"/>
+          <a:stretch>
+            <a:fillRect/>
+          </a:stretch>
+        </p:blipFill>
+        <p:spPr>
+          <a:xfrm>
+            <a:off x="2779759" y="1301517"/>
+            <a:ext cx="1162212" cy="1505160"/>
+          </a:xfrm>
+          <a:prstGeom prst="rect">
+            <a:avLst/>
+          </a:prstGeom>
+        </p:spPr>
+      </p:pic>
     </p:spTree>
     <p:extLst>
       <p:ext uri="{BB962C8B-B14F-4D97-AF65-F5344CB8AC3E}">
